--- a/DBTUNING/ch15_성능튜닝개요/ch15_성능튜닝개요.pptx
+++ b/DBTUNING/ch15_성능튜닝개요/ch15_성능튜닝개요.pptx
@@ -610,7 +610,7 @@
           <a:lstStyle/>
           <a:p>
             <a:r>
-              <a:t>이 실측이 DB Time = DB CPU + 대기라는 등식의 근거입니다. DB time 49,551,722를 DB CPU 8,662,345로 나누면 CPU가 약 17.5퍼센트이고, 나머지 82.5퍼센트는 무언가를 기다린 대기 시간입니다. 만약 이 인스턴스에 성능 문제가 있었다면 82.5퍼센트를 차지하는 대기가 어느 대기 클래스에 속하는지부터 파고들어야 합니다. 단위는 마이크로초 누적값이며, 실제 판단은 두 시점의 델타로 해야 한다는 점을 함께 강조합니다. 상세는 5장에서 다룹니다.</a:t>
+              <a:t>이 실측이 DB Time = DB CPU + 대기라는 등식의 근거입니다. DB time 49,551,722를 DB CPU 8,662,345로 나누면 CPU가 약 17.5퍼센트이고, 나머지 82.5퍼센트는 무언가를 기다린 대기 시간입니다. 만약 이 인스턴스에 성능 문제가 있었다면 82.5퍼센트를 차지하는 대기가 어느 대기 클래스에 속하는지부터 파고들어야 합니다. 단위는 마이크로초 누적값이며, 실제 판단은 두 시점의 델타로 해야 한다는 점을 함께 강조합니다. 상세는 ch19에서 다룹니다.</a:t>
             </a:r>
           </a:p>
         </p:txBody>
@@ -1030,7 +1030,7 @@
           <a:lstStyle/>
           <a:p>
             <a:r>
-              <a:t>ADDM이 무엇이 문제인가를 진단한다면 어드바이저는 어떻게 고칠 것인가를 구체적으로 제시합니다. SQL Tuning Advisor는 개별 SQL을 분석해 프로파일·인덱스·재작성을 권고하고, SQL Access Advisor는 인덱스와 구체화 뷰를 권고합니다. 실습 DB에는 열두 개 어드바이저가 등록돼 있었습니다. 이 중 SQL Tuning·Access Advisor와 SQL Performance Analyzer는 Tuning Pack이 필요하고, Segment·Undo·Statistics 어드바이저는 별도 팩 없이 쓸 수 있습니다. 어드바이저 프레임워크는 15장에서 다룹니다.</a:t>
+              <a:t>ADDM이 무엇이 문제인가를 진단한다면 어드바이저는 어떻게 고칠 것인가를 구체적으로 제시합니다. SQL Tuning Advisor는 개별 SQL을 분석해 프로파일·인덱스·재작성을 권고하고, SQL Access Advisor는 인덱스와 구체화 뷰를 권고합니다. 실습 DB에는 열두 개 어드바이저가 등록돼 있었습니다. 이 중 SQL Tuning·Access Advisor와 SQL Performance Analyzer는 Tuning Pack이 필요하고, Segment·Undo·Statistics 어드바이저는 별도 팩 없이 쓸 수 있습니다. 어드바이저 프레임워크는 ch30에서 다룹니다.</a:t>
             </a:r>
           </a:p>
         </p:txBody>
@@ -1660,7 +1660,7 @@
           <a:lstStyle/>
           <a:p>
             <a:r>
-              <a:t>버퍼 캐시 히트율이 99퍼센트라고 시스템이 건강한 것은 아닙니다. 비효율적인 SQL이 같은 블록을 몇 번이고 다시 읽으면 논리 읽기가 폭증하고 그 대부분이 캐시에서 처리되어 히트율은 오히려 올라갑니다. 히트율이 높은데 응답시간이 나쁜 상황을 17장에서 직접 만들어 봅니다. 히트율은 목표가 아니라 하나의 참고 지표일 뿐이며, 단일 지표 하나로 결론 내지 말고 항상 DB Time 비중과 함께 봐야 한다는 것이 이 과정의 태도입니다.</a:t>
+              <a:t>버퍼 캐시 히트율이 99퍼센트라고 시스템이 건강한 것은 아닙니다. 비효율적인 SQL이 같은 블록을 몇 번이고 다시 읽으면 논리 읽기가 폭증하고 그 대부분이 캐시에서 처리되어 히트율은 오히려 올라갑니다. 히트율이 높은데 응답시간이 나쁜 상황을 ch31에서 직접 만들어 봅니다. 히트율은 목표가 아니라 하나의 참고 지표일 뿐이며, 단일 지표 하나로 결론 내지 말고 항상 DB Time 비중과 함께 봐야 한다는 것이 이 과정의 태도입니다.</a:t>
             </a:r>
           </a:p>
         </p:txBody>
@@ -1730,7 +1730,7 @@
           <a:lstStyle/>
           <a:p>
             <a:r>
-              <a:t>ADDM이나 어드바이저의 권고는 결론이 아니라 가설입니다. 영향도가 낮은 권고에 시간을 쓰거나 맥락을 무시하고 그대로 적용하면 오히려 해가 됩니다. 권고를 그대로 따르면 안 되는 사례를 9장과 15장에서 판별합니다. 권고는 왜 이 권고가 나왔는가라는 근거와 이 권고가 내 상황에 맞는가를 검토한 뒤에만 채택해야 합니다. 어드바이저는 강력한 도구지만 최종 판단의 책임은 언제나 사람에게 있다는 점을 첫 장부터 분명히 해 둡니다.</a:t>
+              <a:t>ADDM이나 어드바이저의 권고는 결론이 아니라 가설입니다. 영향도가 낮은 권고에 시간을 쓰거나 맥락을 무시하고 그대로 적용하면 오히려 해가 됩니다. 권고를 그대로 따르면 안 되는 사례를 ch24과 ch30에서 판별합니다. 권고는 왜 이 권고가 나왔는가라는 근거와 이 권고가 내 상황에 맞는가를 검토한 뒤에만 채택해야 합니다. 어드바이저는 강력한 도구지만 최종 판단의 책임은 언제나 사람에게 있다는 점을 첫 장부터 분명히 해 둡니다.</a:t>
             </a:r>
           </a:p>
         </p:txBody>
@@ -1940,7 +1940,7 @@
           <a:lstStyle/>
           <a:p>
             <a:r>
-              <a:t>이 실측에서 대부분의 값이 0인 것은 오류가 아니라 캡처 순간 부하가 없었기 때문입니다. Average Active Sessions가 0이면 활성 세션이 사실상 없다는 뜻이고, 그러니 Response Time Per Txn도 0으로 나옵니다. 여기서 1장의 핵심 교육 포인트를 짚어야 합니다. 성능 지표는 부하가 있어야 나타나며, 조회만 하는 실습으로는 성능 데이터를 만들 수 없습니다. 그래서 5장부터 공용 부하 스크립트로 실제 부하를 유발한 뒤 지표를 측정합니다.</a:t>
+              <a:t>이 실측에서 대부분의 값이 0인 것은 오류가 아니라 캡처 순간 부하가 없었기 때문입니다. Average Active Sessions가 0이면 활성 세션이 사실상 없다는 뜻이고, 그러니 Response Time Per Txn도 0으로 나옵니다. 여기서 ch15의 핵심 교육 포인트를 짚어야 합니다. 성능 지표는 부하가 있어야 나타나며, 조회만 하는 실습으로는 성능 데이터를 만들 수 없습니다. 그래서 ch19부터 공용 부하 스크립트로 실제 부하를 유발한 뒤 지표를 측정합니다.</a:t>
             </a:r>
           </a:p>
         </p:txBody>
@@ -5580,7 +5580,7 @@
                 <a:latin typeface="맑은 고딕"/>
                 <a:ea typeface="맑은 고딕"/>
               </a:rPr>
-              <a:t>제1장</a:t>
+              <a:t>제ch15</a:t>
             </a:r>
           </a:p>
         </p:txBody>
@@ -7994,7 +7994,7 @@
                 <a:latin typeface="맑은 고딕"/>
                 <a:ea typeface="맑은 고딕"/>
               </a:rPr>
-              <a:t>•  진단 경로: 세션 → 대기 → SQL → 세그먼트 (13장)</a:t>
+              <a:t>•  진단 경로: 세션 → 대기 → SQL → 세그먼트 (ch26)</a:t>
             </a:r>
           </a:p>
           <a:p>
@@ -8718,7 +8718,7 @@
                 <a:latin typeface="맑은 고딕"/>
                 <a:ea typeface="맑은 고딕"/>
               </a:rPr>
-              <a:t>•  권고는 결론이 아니라 가설 — 영향도·근거 확인 후 채택(9장)</a:t>
+              <a:t>•  권고는 결론이 아니라 가설 — 영향도·근거 확인 후 채택(ch24)</a:t>
             </a:r>
           </a:p>
         </p:txBody>
@@ -12339,7 +12339,7 @@
                 <a:latin typeface="맑은 고딕"/>
                 <a:ea typeface="맑은 고딕"/>
               </a:rPr>
-              <a:t>•  히트율이 높은데 응답시간이 나쁜 상황을 17장에서 직접 재현</a:t>
+              <a:t>•  히트율이 높은데 응답시간이 나쁜 상황을 ch31에서 직접 재현</a:t>
             </a:r>
           </a:p>
           <a:p>
@@ -12564,7 +12564,7 @@
                 <a:latin typeface="맑은 고딕"/>
                 <a:ea typeface="맑은 고딕"/>
               </a:rPr>
-              <a:t>•  권고를 그대로 따르면 안 되는 사례를 9·15장에서 판별</a:t>
+              <a:t>•  권고를 그대로 따르면 안 되는 사례를 ch24·ch30에서 판별</a:t>
             </a:r>
           </a:p>
           <a:p>

--- a/DBTUNING/ch15_성능튜닝개요/ch15_성능튜닝개요.pptx
+++ b/DBTUNING/ch15_성능튜닝개요/ch15_성능튜닝개요.pptx
@@ -5580,7 +5580,7 @@
                 <a:latin typeface="맑은 고딕"/>
                 <a:ea typeface="맑은 고딕"/>
               </a:rPr>
-              <a:t>제ch15</a:t>
+              <a:t>ch15</a:t>
             </a:r>
           </a:p>
         </p:txBody>

--- a/DBTUNING/ch15_성능튜닝개요/ch15_성능튜닝개요.pptx
+++ b/DBTUNING/ch15_성능튜닝개요/ch15_성능튜닝개요.pptx
@@ -6578,7 +6578,7 @@
                 <a:latin typeface="맑은 고딕"/>
                 <a:ea typeface="맑은 고딕"/>
               </a:rPr>
-              <a:t>1.4</a:t>
+              <a:t>15.4</a:t>
             </a:r>
           </a:p>
         </p:txBody>
@@ -7615,7 +7615,7 @@
                 <a:latin typeface="맑은 고딕"/>
                 <a:ea typeface="맑은 고딕"/>
               </a:rPr>
-              <a:t>1.5</a:t>
+              <a:t>15.5</a:t>
             </a:r>
           </a:p>
         </p:txBody>
@@ -9575,7 +9575,7 @@
                 <a:latin typeface="맑은 고딕"/>
                 <a:ea typeface="맑은 고딕"/>
               </a:rPr>
-              <a:t>1.6</a:t>
+              <a:t>15.6</a:t>
             </a:r>
           </a:p>
         </p:txBody>
@@ -10931,7 +10931,7 @@
                 <a:latin typeface="맑은 고딕"/>
                 <a:ea typeface="맑은 고딕"/>
               </a:rPr>
-              <a:t>•  1.2  응답시간과 처리량 — 성능을 무엇으로 재는가</a:t>
+              <a:t>•  15.2  응답시간과 처리량 — 성능을 무엇으로 재는가</a:t>
             </a:r>
           </a:p>
           <a:p>
@@ -10948,7 +10948,7 @@
                 <a:latin typeface="맑은 고딕"/>
                 <a:ea typeface="맑은 고딕"/>
               </a:rPr>
-              <a:t>•  1.3  튜닝이 필요한 시점 — 언제 손대는가</a:t>
+              <a:t>•  15.3  튜닝이 필요한 시점 — 언제 손대는가</a:t>
             </a:r>
           </a:p>
           <a:p>
@@ -10965,7 +10965,7 @@
                 <a:latin typeface="맑은 고딕"/>
                 <a:ea typeface="맑은 고딕"/>
               </a:rPr>
-              <a:t>•  1.4  DB Time — 이 과정의 공통 화폐</a:t>
+              <a:t>•  15.4  DB Time — 이 과정의 공통 화폐</a:t>
             </a:r>
           </a:p>
           <a:p>
@@ -10982,7 +10982,7 @@
                 <a:latin typeface="맑은 고딕"/>
                 <a:ea typeface="맑은 고딕"/>
               </a:rPr>
-              <a:t>•  1.5  성능 도구 지도 — 무엇을 언제 쓰는가</a:t>
+              <a:t>•  15.5  성능 도구 지도 — 무엇을 언제 쓰는가</a:t>
             </a:r>
           </a:p>
           <a:p>
@@ -10999,7 +10999,7 @@
                 <a:latin typeface="맑은 고딕"/>
                 <a:ea typeface="맑은 고딕"/>
               </a:rPr>
-              <a:t>•  1.6  관리 팩 라이선스 — 무심코 쓰면 위반이다</a:t>
+              <a:t>•  15.6  관리 팩 라이선스 — 무심코 쓰면 위반이다</a:t>
             </a:r>
           </a:p>
           <a:p>
@@ -11016,7 +11016,7 @@
                 <a:latin typeface="맑은 고딕"/>
                 <a:ea typeface="맑은 고딕"/>
               </a:rPr>
-              <a:t>•  1.7  튜닝 목표를 수치로 정의하는 법</a:t>
+              <a:t>•  15.7  튜닝 목표를 수치로 정의하는 법</a:t>
             </a:r>
           </a:p>
           <a:p>
@@ -11033,7 +11033,7 @@
                 <a:latin typeface="맑은 고딕"/>
                 <a:ea typeface="맑은 고딕"/>
               </a:rPr>
-              <a:t>•  1.8  세 가지 경계 — 이 과정의 태도</a:t>
+              <a:t>•  15.8  세 가지 경계 — 이 과정의 태도</a:t>
             </a:r>
           </a:p>
           <a:p>
@@ -11148,7 +11148,7 @@
                 <a:latin typeface="맑은 고딕"/>
                 <a:ea typeface="맑은 고딕"/>
               </a:rPr>
-              <a:t>1.7</a:t>
+              <a:t>15.7</a:t>
             </a:r>
           </a:p>
         </p:txBody>
@@ -11960,7 +11960,7 @@
                 <a:latin typeface="맑은 고딕"/>
                 <a:ea typeface="맑은 고딕"/>
               </a:rPr>
-              <a:t>1.8</a:t>
+              <a:t>15.8</a:t>
             </a:r>
           </a:p>
         </p:txBody>
@@ -13607,7 +13607,7 @@
                 <a:latin typeface="맑은 고딕"/>
                 <a:ea typeface="맑은 고딕"/>
               </a:rPr>
-              <a:t>1.2</a:t>
+              <a:t>15.2</a:t>
             </a:r>
           </a:p>
         </p:txBody>
@@ -14882,7 +14882,7 @@
                 <a:latin typeface="맑은 고딕"/>
                 <a:ea typeface="맑은 고딕"/>
               </a:rPr>
-              <a:t>1.3</a:t>
+              <a:t>15.3</a:t>
             </a:r>
           </a:p>
         </p:txBody>
